--- a/docs/Stage2_Presentation_v2.pptx
+++ b/docs/Stage2_Presentation_v2.pptx
@@ -278,6 +278,7 @@
             <c:showLeaderLines val="0"/>
             <c:extLst>
               <c:ext xmlns:c15="http://schemas.microsoft.com/office/drawing/2012/chart" uri="{CE6537A1-D6FC-4f65-9D91-7224C49458BB}">
+                <c15:layout/>
                 <c15:showLeaderLines val="0"/>
               </c:ext>
             </c:extLst>
@@ -23286,7 +23287,7 @@
           <a:p>
             <a:pPr algn="ctr"/>
             <a:r>
-              <a:rPr lang="en-US" sz="2400" b="1" smtClean="0">
+              <a:rPr lang="en-US" sz="2400" b="1" dirty="0" smtClean="0">
                 <a:solidFill>
                   <a:srgbClr val="FFFFFF"/>
                 </a:solidFill>
@@ -23294,7 +23295,7 @@
               </a:rPr>
               <a:t>Open live dashboard  →</a:t>
             </a:r>
-            <a:endParaRPr lang="en-US" sz="2400" b="1">
+            <a:endParaRPr lang="en-US" sz="2400" b="1" dirty="0">
               <a:solidFill>
                 <a:srgbClr val="FFFFFF"/>
               </a:solidFill>
@@ -23327,7 +23328,7 @@
           <a:p>
             <a:pPr algn="ctr"/>
             <a:r>
-              <a:rPr lang="en-US" sz="1600" smtClean="0">
+              <a:rPr lang="en-US" sz="1600" dirty="0" smtClean="0">
                 <a:solidFill>
                   <a:srgbClr val="4472C4"/>
                 </a:solidFill>
@@ -23336,7 +23337,7 @@
               </a:rPr>
               <a:t>da-assignment.iamrithy.com</a:t>
             </a:r>
-            <a:endParaRPr lang="en-US" sz="1600">
+            <a:endParaRPr lang="en-US" sz="1600" dirty="0">
               <a:solidFill>
                 <a:srgbClr val="4472C4"/>
               </a:solidFill>
